--- a/assets/powerpoints/module-alimentation/B2-du-de-la-des.pptx
+++ b/assets/powerpoints/module-alimentation/B2-du-de-la-des.pptx
@@ -9012,7 +9012,43 @@
                 </a:solidFill>
                 <a:latin typeface="Verdana"/>
               </a:rPr>
-              <a:t>« Je prends du riz » devient « je ne prends pas &lt;b&gt;de&lt;/b&gt; riz ». « Il y a des tomates » devient « il n'y a pas &lt;b&gt;de&lt;/b&gt; tomates ». Cette règle n'a pas d'exception.</a:t>
+              <a:t>« Je prends du riz » devient « je ne prends pas </a:t>
+            </a:r>
+            <a:r>
+              <a:rPr sz="2000" b="1" i="0">
+                <a:solidFill>
+                  <a:srgbClr val="4B4F52"/>
+                </a:solidFill>
+                <a:latin typeface="Verdana"/>
+              </a:rPr>
+              <a:t>de</a:t>
+            </a:r>
+            <a:r>
+              <a:rPr sz="2000" b="0" i="0">
+                <a:solidFill>
+                  <a:srgbClr val="4B4F52"/>
+                </a:solidFill>
+                <a:latin typeface="Verdana"/>
+              </a:rPr>
+              <a:t> riz ». « Il y a des tomates » devient « il n'y a pas </a:t>
+            </a:r>
+            <a:r>
+              <a:rPr sz="2000" b="1" i="0">
+                <a:solidFill>
+                  <a:srgbClr val="4B4F52"/>
+                </a:solidFill>
+                <a:latin typeface="Verdana"/>
+              </a:rPr>
+              <a:t>de</a:t>
+            </a:r>
+            <a:r>
+              <a:rPr sz="2000" b="0" i="0">
+                <a:solidFill>
+                  <a:srgbClr val="4B4F52"/>
+                </a:solidFill>
+                <a:latin typeface="Verdana"/>
+              </a:rPr>
+              <a:t> tomates ». Cette règle n'a pas d'exception.</a:t>
             </a:r>
           </a:p>
         </p:txBody>
@@ -9359,7 +9395,115 @@
                 </a:solidFill>
                 <a:latin typeface="Verdana"/>
               </a:rPr>
-              <a:t>« du bœuf haché » devient « une livre &lt;b&gt;de&lt;/b&gt; bœuf haché ». « du jambon » devient « deux cents grammes &lt;b&gt;de&lt;/b&gt; jambon ». Aussi : un kilo &lt;b&gt;de&lt;/b&gt; riz, un litre &lt;b&gt;d'&lt;/b&gt;eau, une douzaine &lt;b&gt;d'&lt;/b&gt;œufs, beaucoup &lt;b&gt;de&lt;/b&gt; monde.</a:t>
+              <a:t>« du bœuf haché » devient « une livre </a:t>
+            </a:r>
+            <a:r>
+              <a:rPr sz="2000" b="1" i="0">
+                <a:solidFill>
+                  <a:srgbClr val="4B4F52"/>
+                </a:solidFill>
+                <a:latin typeface="Verdana"/>
+              </a:rPr>
+              <a:t>de</a:t>
+            </a:r>
+            <a:r>
+              <a:rPr sz="2000" b="0" i="0">
+                <a:solidFill>
+                  <a:srgbClr val="4B4F52"/>
+                </a:solidFill>
+                <a:latin typeface="Verdana"/>
+              </a:rPr>
+              <a:t> bœuf haché ». « du jambon » devient « deux cents grammes </a:t>
+            </a:r>
+            <a:r>
+              <a:rPr sz="2000" b="1" i="0">
+                <a:solidFill>
+                  <a:srgbClr val="4B4F52"/>
+                </a:solidFill>
+                <a:latin typeface="Verdana"/>
+              </a:rPr>
+              <a:t>de</a:t>
+            </a:r>
+            <a:r>
+              <a:rPr sz="2000" b="0" i="0">
+                <a:solidFill>
+                  <a:srgbClr val="4B4F52"/>
+                </a:solidFill>
+                <a:latin typeface="Verdana"/>
+              </a:rPr>
+              <a:t> jambon ». Aussi : un kilo </a:t>
+            </a:r>
+            <a:r>
+              <a:rPr sz="2000" b="1" i="0">
+                <a:solidFill>
+                  <a:srgbClr val="4B4F52"/>
+                </a:solidFill>
+                <a:latin typeface="Verdana"/>
+              </a:rPr>
+              <a:t>de</a:t>
+            </a:r>
+            <a:r>
+              <a:rPr sz="2000" b="0" i="0">
+                <a:solidFill>
+                  <a:srgbClr val="4B4F52"/>
+                </a:solidFill>
+                <a:latin typeface="Verdana"/>
+              </a:rPr>
+              <a:t> riz, un litre </a:t>
+            </a:r>
+            <a:r>
+              <a:rPr sz="2000" b="1" i="0">
+                <a:solidFill>
+                  <a:srgbClr val="4B4F52"/>
+                </a:solidFill>
+                <a:latin typeface="Verdana"/>
+              </a:rPr>
+              <a:t>d'</a:t>
+            </a:r>
+            <a:r>
+              <a:rPr sz="2000" b="0" i="0">
+                <a:solidFill>
+                  <a:srgbClr val="4B4F52"/>
+                </a:solidFill>
+                <a:latin typeface="Verdana"/>
+              </a:rPr>
+              <a:t>eau, une douzaine </a:t>
+            </a:r>
+            <a:r>
+              <a:rPr sz="2000" b="1" i="0">
+                <a:solidFill>
+                  <a:srgbClr val="4B4F52"/>
+                </a:solidFill>
+                <a:latin typeface="Verdana"/>
+              </a:rPr>
+              <a:t>d'</a:t>
+            </a:r>
+            <a:r>
+              <a:rPr sz="2000" b="0" i="0">
+                <a:solidFill>
+                  <a:srgbClr val="4B4F52"/>
+                </a:solidFill>
+                <a:latin typeface="Verdana"/>
+              </a:rPr>
+              <a:t>œufs, beaucoup </a:t>
+            </a:r>
+            <a:r>
+              <a:rPr sz="2000" b="1" i="0">
+                <a:solidFill>
+                  <a:srgbClr val="4B4F52"/>
+                </a:solidFill>
+                <a:latin typeface="Verdana"/>
+              </a:rPr>
+              <a:t>de</a:t>
+            </a:r>
+            <a:r>
+              <a:rPr sz="2000" b="0" i="0">
+                <a:solidFill>
+                  <a:srgbClr val="4B4F52"/>
+                </a:solidFill>
+                <a:latin typeface="Verdana"/>
+              </a:rPr>
+              <a:t> monde.</a:t>
             </a:r>
           </a:p>
         </p:txBody>
@@ -9908,7 +10052,25 @@
                 </a:solidFill>
                 <a:latin typeface="Verdana"/>
               </a:rPr>
-              <a:t>« Le poulet » désigne un poulet précis, que les deux personnes connaissent — celui qui est sur le comptoir, par exemple. Au moment de commander, on veut une certaine quantité, sans dire laquelle : c'est &lt;b&gt;du&lt;/b&gt;.</a:t>
+              <a:t>« Le poulet » désigne un poulet précis, que les deux personnes connaissent — celui qui est sur le comptoir, par exemple. Au moment de commander, on veut une certaine quantité, sans dire laquelle : c'est </a:t>
+            </a:r>
+            <a:r>
+              <a:rPr sz="2000" b="1" i="0">
+                <a:solidFill>
+                  <a:srgbClr val="4B4F52"/>
+                </a:solidFill>
+                <a:latin typeface="Verdana"/>
+              </a:rPr>
+              <a:t>du</a:t>
+            </a:r>
+            <a:r>
+              <a:rPr sz="2000" b="0" i="0">
+                <a:solidFill>
+                  <a:srgbClr val="4B4F52"/>
+                </a:solidFill>
+                <a:latin typeface="Verdana"/>
+              </a:rPr>
+              <a:t>.</a:t>
             </a:r>
           </a:p>
         </p:txBody>
